--- a/tutor-time/payday-budgeting-lesson/downloads/Payday.pptx
+++ b/tutor-time/payday-budgeting-lesson/downloads/Payday.pptx
@@ -7590,7 +7590,7 @@
                 </a:solidFill>
                 <a:latin typeface="Karla"/>
               </a:rPr>
-              <a:t>Everyone is going. They asked you first, before anybody else, and they are waiting for you to reply. You can say no. People do say no.</a:t>
+              <a:t>Everyone is going. They asked you first, and they are waiting for you to reply. You can say no. People do say no.</a:t>
             </a:r>
           </a:p>
         </p:txBody>
@@ -10826,7 +10826,7 @@
                 </a:solidFill>
                 <a:latin typeface="Karla"/>
               </a:rPr>
-              <a:t>The car makes the flat further out possible and the savings impossible. Nothing here is wrong. You only get to pick some of it.</a:t>
+              <a:t>A car lets you live further out, where rent is cheaper, but then there is nothing to save. Nothing here is wrong. You only get to pick some of it.</a:t>
             </a:r>
           </a:p>
         </p:txBody>

--- a/tutor-time/payday-budgeting-lesson/downloads/Payday.pptx
+++ b/tutor-time/payday-budgeting-lesson/downloads/Payday.pptx
@@ -3208,11 +3208,11 @@
               </a:spcAft>
             </a:pPr>
             <a:r>
-              <a:rPr sz="5200" b="1" i="0">
+              <a:rPr sz="5200" b="0" i="0">
                 <a:solidFill>
                   <a:srgbClr val="2F5470"/>
                 </a:solidFill>
-                <a:latin typeface="Libre Caslon Display"/>
+                <a:latin typeface="Georgia"/>
               </a:rPr>
               <a:t>Payday</a:t>
             </a:r>
@@ -3298,7 +3298,7 @@
                 <a:solidFill>
                   <a:srgbClr val="6B7681"/>
                 </a:solidFill>
-                <a:latin typeface="Karla"/>
+                <a:latin typeface="Calibri"/>
               </a:rPr>
               <a:t>One month. One wage. Everything it has to cover.</a:t>
             </a:r>
@@ -3340,7 +3340,7 @@
                 <a:solidFill>
                   <a:srgbClr val="A2ACB5"/>
                 </a:solidFill>
-                <a:latin typeface="Karla"/>
+                <a:latin typeface="Calibri"/>
               </a:rPr>
               <a:t>A budgeting lesson</a:t>
             </a:r>
@@ -3406,7 +3406,7 @@
                 <a:solidFill>
                   <a:srgbClr val="A2ACB5"/>
                 </a:solidFill>
-                <a:latin typeface="Karla"/>
+                <a:latin typeface="Calibri"/>
               </a:rPr>
               <a:t>The Pastoral Guide</a:t>
             </a:r>
@@ -3448,7 +3448,7 @@
                 <a:solidFill>
                   <a:srgbClr val="A2ACB5"/>
                 </a:solidFill>
-                <a:latin typeface="Karla"/>
+                <a:latin typeface="Calibri"/>
               </a:rPr>
               <a:t>1 / 22</a:t>
             </a:r>
@@ -3552,7 +3552,7 @@
                 <a:solidFill>
                   <a:srgbClr val="C3D6E2"/>
                 </a:solidFill>
-                <a:latin typeface="Karla"/>
+                <a:latin typeface="Calibri"/>
               </a:rPr>
               <a:t>THE FIFTH</a:t>
             </a:r>
@@ -3640,7 +3640,7 @@
                 <a:solidFill>
                   <a:srgbClr val="2F5470"/>
                 </a:solidFill>
-                <a:latin typeface="Karla"/>
+                <a:latin typeface="Calibri"/>
               </a:rPr>
               <a:t>EVENT 2 OF 10</a:t>
             </a:r>
@@ -3678,21 +3678,21 @@
               </a:spcAft>
             </a:pPr>
             <a:r>
-              <a:rPr sz="2500" b="1" i="0">
+              <a:rPr sz="2500" b="0" i="0">
                 <a:solidFill>
                   <a:srgbClr val="FFFDF7"/>
                 </a:solidFill>
-                <a:latin typeface="Libre Caslon Display"/>
+                <a:latin typeface="Georgia"/>
               </a:rPr>
               <a:t>You drop your phone on the way out</a:t>
             </a:r>
             <a:br/>
             <a:r>
-              <a:rPr sz="2500" b="1" i="0">
+              <a:rPr sz="2500" b="0" i="0">
                 <a:solidFill>
                   <a:srgbClr val="FFFDF7"/>
                 </a:solidFill>
-                <a:latin typeface="Libre Caslon Display"/>
+                <a:latin typeface="Georgia"/>
               </a:rPr>
               <a:t>and the screen goes.</a:t>
             </a:r>
@@ -3734,7 +3734,7 @@
                 <a:solidFill>
                   <a:srgbClr val="C3D6E2"/>
                 </a:solidFill>
-                <a:latin typeface="Karla"/>
+                <a:latin typeface="Calibri"/>
               </a:rPr>
               <a:t>It still works. You can live with a cracked screen for a while. People do.</a:t>
             </a:r>
@@ -3888,11 +3888,11 @@
               </a:spcAft>
             </a:pPr>
             <a:r>
-              <a:rPr sz="1450" b="1" i="0">
+              <a:rPr sz="1450" b="0" i="0">
                 <a:solidFill>
                   <a:srgbClr val="2F5470"/>
                 </a:solidFill>
-                <a:latin typeface="Libre Caslon Display"/>
+                <a:latin typeface="Georgia"/>
               </a:rPr>
               <a:t>£120, or live with it</a:t>
             </a:r>
@@ -3958,7 +3958,7 @@
                 <a:solidFill>
                   <a:srgbClr val="C3D6E2"/>
                 </a:solidFill>
-                <a:latin typeface="Karla"/>
+                <a:latin typeface="Calibri"/>
               </a:rPr>
               <a:t>The Pastoral Guide</a:t>
             </a:r>
@@ -4000,7 +4000,7 @@
                 <a:solidFill>
                   <a:srgbClr val="C3D6E2"/>
                 </a:solidFill>
-                <a:latin typeface="Karla"/>
+                <a:latin typeface="Calibri"/>
               </a:rPr>
               <a:t>10 / 22</a:t>
             </a:r>
@@ -4104,7 +4104,7 @@
                 <a:solidFill>
                   <a:srgbClr val="C3D6E2"/>
                 </a:solidFill>
-                <a:latin typeface="Karla"/>
+                <a:latin typeface="Calibri"/>
               </a:rPr>
               <a:t>THE SEVENTH</a:t>
             </a:r>
@@ -4192,7 +4192,7 @@
                 <a:solidFill>
                   <a:srgbClr val="2F5470"/>
                 </a:solidFill>
-                <a:latin typeface="Karla"/>
+                <a:latin typeface="Calibri"/>
               </a:rPr>
               <a:t>EVENT 3 OF 10</a:t>
             </a:r>
@@ -4230,11 +4230,11 @@
               </a:spcAft>
             </a:pPr>
             <a:r>
-              <a:rPr sz="2500" b="1" i="0">
+              <a:rPr sz="2500" b="0" i="0">
                 <a:solidFill>
                   <a:srgbClr val="FFFDF7"/>
                 </a:solidFill>
-                <a:latin typeface="Libre Caslon Display"/>
+                <a:latin typeface="Georgia"/>
               </a:rPr>
               <a:t>Your card gets declined at the till.</a:t>
             </a:r>
@@ -4276,7 +4276,7 @@
                 <a:solidFill>
                   <a:srgbClr val="C3D6E2"/>
                 </a:solidFill>
-                <a:latin typeface="Karla"/>
+                <a:latin typeface="Calibri"/>
               </a:rPr>
               <a:t>There is a subscription you forgot you signed up to, and it has been going out since August. Nobody reminded you because nobody had to.</a:t>
             </a:r>
@@ -4430,11 +4430,11 @@
               </a:spcAft>
             </a:pPr>
             <a:r>
-              <a:rPr sz="1450" b="1" i="0">
+              <a:rPr sz="1450" b="0" i="0">
                 <a:solidFill>
                   <a:srgbClr val="2F5470"/>
                 </a:solidFill>
-                <a:latin typeface="Libre Caslon Display"/>
+                <a:latin typeface="Georgia"/>
               </a:rPr>
               <a:t>£14 a month, and £42 already gone</a:t>
             </a:r>
@@ -4500,7 +4500,7 @@
                 <a:solidFill>
                   <a:srgbClr val="C3D6E2"/>
                 </a:solidFill>
-                <a:latin typeface="Karla"/>
+                <a:latin typeface="Calibri"/>
               </a:rPr>
               <a:t>The Pastoral Guide</a:t>
             </a:r>
@@ -4542,7 +4542,7 @@
                 <a:solidFill>
                   <a:srgbClr val="C3D6E2"/>
                 </a:solidFill>
-                <a:latin typeface="Karla"/>
+                <a:latin typeface="Calibri"/>
               </a:rPr>
               <a:t>11 / 22</a:t>
             </a:r>
@@ -4646,7 +4646,7 @@
                 <a:solidFill>
                   <a:srgbClr val="C3D6E2"/>
                 </a:solidFill>
-                <a:latin typeface="Karla"/>
+                <a:latin typeface="Calibri"/>
               </a:rPr>
               <a:t>THE NINTH</a:t>
             </a:r>
@@ -4734,7 +4734,7 @@
                 <a:solidFill>
                   <a:srgbClr val="2F5470"/>
                 </a:solidFill>
-                <a:latin typeface="Karla"/>
+                <a:latin typeface="Calibri"/>
               </a:rPr>
               <a:t>EVENT 4 OF 10</a:t>
             </a:r>
@@ -4772,21 +4772,21 @@
               </a:spcAft>
             </a:pPr>
             <a:r>
-              <a:rPr sz="2500" b="1" i="0">
+              <a:rPr sz="2500" b="0" i="0">
                 <a:solidFill>
                   <a:srgbClr val="FFFDF7"/>
                 </a:solidFill>
-                <a:latin typeface="Libre Caslon Display"/>
+                <a:latin typeface="Georgia"/>
               </a:rPr>
               <a:t>You wake up and you can see</a:t>
             </a:r>
             <a:br/>
             <a:r>
-              <a:rPr sz="2500" b="1" i="0">
+              <a:rPr sz="2500" b="0" i="0">
                 <a:solidFill>
                   <a:srgbClr val="FFFDF7"/>
                 </a:solidFill>
-                <a:latin typeface="Libre Caslon Display"/>
+                <a:latin typeface="Georgia"/>
               </a:rPr>
               <a:t>your own breath. The hot water has gone.</a:t>
             </a:r>
@@ -4828,7 +4828,7 @@
                 <a:solidFill>
                   <a:srgbClr val="C3D6E2"/>
                 </a:solidFill>
-                <a:latin typeface="Karla"/>
+                <a:latin typeface="Calibri"/>
               </a:rPr>
               <a:t>The landlord will fix it. Eventually. Meanwhile there is a plug-in heater that eats electricity, and a launderette three streets away.</a:t>
             </a:r>
@@ -4982,11 +4982,11 @@
               </a:spcAft>
             </a:pPr>
             <a:r>
-              <a:rPr sz="1450" b="1" i="0">
+              <a:rPr sz="1450" b="0" i="0">
                 <a:solidFill>
                   <a:srgbClr val="2F5470"/>
                 </a:solidFill>
-                <a:latin typeface="Libre Caslon Display"/>
+                <a:latin typeface="Georgia"/>
               </a:rPr>
               <a:t>Hand back £150</a:t>
             </a:r>
@@ -5052,7 +5052,7 @@
                 <a:solidFill>
                   <a:srgbClr val="C3D6E2"/>
                 </a:solidFill>
-                <a:latin typeface="Karla"/>
+                <a:latin typeface="Calibri"/>
               </a:rPr>
               <a:t>The Pastoral Guide</a:t>
             </a:r>
@@ -5094,7 +5094,7 @@
                 <a:solidFill>
                   <a:srgbClr val="C3D6E2"/>
                 </a:solidFill>
-                <a:latin typeface="Karla"/>
+                <a:latin typeface="Calibri"/>
               </a:rPr>
               <a:t>12 / 22</a:t>
             </a:r>
@@ -5198,7 +5198,7 @@
                 <a:solidFill>
                   <a:srgbClr val="C3D6E2"/>
                 </a:solidFill>
-                <a:latin typeface="Karla"/>
+                <a:latin typeface="Calibri"/>
               </a:rPr>
               <a:t>THE TWELFTH</a:t>
             </a:r>
@@ -5286,7 +5286,7 @@
                 <a:solidFill>
                   <a:srgbClr val="2F5470"/>
                 </a:solidFill>
-                <a:latin typeface="Karla"/>
+                <a:latin typeface="Calibri"/>
               </a:rPr>
               <a:t>EVENT 5 OF 10</a:t>
             </a:r>
@@ -5324,11 +5324,11 @@
               </a:spcAft>
             </a:pPr>
             <a:r>
-              <a:rPr sz="2500" b="1" i="0">
+              <a:rPr sz="2500" b="0" i="0">
                 <a:solidFill>
                   <a:srgbClr val="FFFDF7"/>
                 </a:solidFill>
-                <a:latin typeface="Libre Caslon Display"/>
+                <a:latin typeface="Georgia"/>
               </a:rPr>
               <a:t>The bus route changes.</a:t>
             </a:r>
@@ -5370,7 +5370,7 @@
                 <a:solidFill>
                   <a:srgbClr val="C3D6E2"/>
                 </a:solidFill>
-                <a:latin typeface="Karla"/>
+                <a:latin typeface="Calibri"/>
               </a:rPr>
               <a:t>The one you relied on no longer runs that way, and the only thing that does is more expensive and leaves earlier.</a:t>
             </a:r>
@@ -5524,11 +5524,11 @@
               </a:spcAft>
             </a:pPr>
             <a:r>
-              <a:rPr sz="1450" b="1" i="0">
+              <a:rPr sz="1450" b="0" i="0">
                 <a:solidFill>
                   <a:srgbClr val="2F5470"/>
                 </a:solidFill>
-                <a:latin typeface="Libre Caslon Display"/>
+                <a:latin typeface="Georgia"/>
               </a:rPr>
               <a:t>Getting around costs £55 more</a:t>
             </a:r>
@@ -5594,7 +5594,7 @@
                 <a:solidFill>
                   <a:srgbClr val="C3D6E2"/>
                 </a:solidFill>
-                <a:latin typeface="Karla"/>
+                <a:latin typeface="Calibri"/>
               </a:rPr>
               <a:t>The Pastoral Guide</a:t>
             </a:r>
@@ -5636,7 +5636,7 @@
                 <a:solidFill>
                   <a:srgbClr val="C3D6E2"/>
                 </a:solidFill>
-                <a:latin typeface="Karla"/>
+                <a:latin typeface="Calibri"/>
               </a:rPr>
               <a:t>13 / 22</a:t>
             </a:r>
@@ -5740,7 +5740,7 @@
                 <a:solidFill>
                   <a:srgbClr val="C3D6E2"/>
                 </a:solidFill>
-                <a:latin typeface="Karla"/>
+                <a:latin typeface="Calibri"/>
               </a:rPr>
               <a:t>THE FOURTEENTH</a:t>
             </a:r>
@@ -5828,7 +5828,7 @@
                 <a:solidFill>
                   <a:srgbClr val="2F5470"/>
                 </a:solidFill>
-                <a:latin typeface="Karla"/>
+                <a:latin typeface="Calibri"/>
               </a:rPr>
               <a:t>EVENT 6 OF 10</a:t>
             </a:r>
@@ -5866,21 +5866,21 @@
               </a:spcAft>
             </a:pPr>
             <a:r>
-              <a:rPr sz="2500" b="1" i="0">
+              <a:rPr sz="2500" b="0" i="0">
                 <a:solidFill>
                   <a:srgbClr val="FFFDF7"/>
                 </a:solidFill>
-                <a:latin typeface="Libre Caslon Display"/>
+                <a:latin typeface="Georgia"/>
               </a:rPr>
               <a:t>Your manager catches you on the way out.</a:t>
             </a:r>
             <a:br/>
             <a:r>
-              <a:rPr sz="2500" b="1" i="0">
+              <a:rPr sz="2500" b="0" i="0">
                 <a:solidFill>
                   <a:srgbClr val="FFFDF7"/>
                 </a:solidFill>
-                <a:latin typeface="Libre Caslon Display"/>
+                <a:latin typeface="Georgia"/>
               </a:rPr>
               <a:t>“Can we have a quick word?”</a:t>
             </a:r>
@@ -5922,7 +5922,7 @@
                 <a:solidFill>
                   <a:srgbClr val="C3D6E2"/>
                 </a:solidFill>
-                <a:latin typeface="Karla"/>
+                <a:latin typeface="Calibri"/>
               </a:rPr>
               <a:t>Nothing personal. It is quiet, everyone is losing hours this month, it will pick up. Your rent has not heard about any of this.</a:t>
             </a:r>
@@ -6076,11 +6076,11 @@
               </a:spcAft>
             </a:pPr>
             <a:r>
-              <a:rPr sz="1450" b="1" i="0">
+              <a:rPr sz="1450" b="0" i="0">
                 <a:solidFill>
                   <a:srgbClr val="2F5470"/>
                 </a:solidFill>
-                <a:latin typeface="Libre Caslon Display"/>
+                <a:latin typeface="Georgia"/>
               </a:rPr>
               <a:t>Hand back £200</a:t>
             </a:r>
@@ -6146,7 +6146,7 @@
                 <a:solidFill>
                   <a:srgbClr val="C3D6E2"/>
                 </a:solidFill>
-                <a:latin typeface="Karla"/>
+                <a:latin typeface="Calibri"/>
               </a:rPr>
               <a:t>The Pastoral Guide</a:t>
             </a:r>
@@ -6188,7 +6188,7 @@
                 <a:solidFill>
                   <a:srgbClr val="C3D6E2"/>
                 </a:solidFill>
-                <a:latin typeface="Karla"/>
+                <a:latin typeface="Calibri"/>
               </a:rPr>
               <a:t>14 / 22</a:t>
             </a:r>
@@ -6292,7 +6292,7 @@
                 <a:solidFill>
                   <a:srgbClr val="C3D6E2"/>
                 </a:solidFill>
-                <a:latin typeface="Karla"/>
+                <a:latin typeface="Calibri"/>
               </a:rPr>
               <a:t>THE SIXTEENTH</a:t>
             </a:r>
@@ -6380,7 +6380,7 @@
                 <a:solidFill>
                   <a:srgbClr val="2F5470"/>
                 </a:solidFill>
-                <a:latin typeface="Karla"/>
+                <a:latin typeface="Calibri"/>
               </a:rPr>
               <a:t>EVENT 7 OF 10</a:t>
             </a:r>
@@ -6418,21 +6418,21 @@
               </a:spcAft>
             </a:pPr>
             <a:r>
-              <a:rPr sz="2500" b="1" i="0">
+              <a:rPr sz="2500" b="0" i="0">
                 <a:solidFill>
                   <a:srgbClr val="FFFDF7"/>
                 </a:solidFill>
-                <a:latin typeface="Libre Caslon Display"/>
+                <a:latin typeface="Georgia"/>
               </a:rPr>
               <a:t>The car will not pass its next check</a:t>
             </a:r>
             <a:br/>
             <a:r>
-              <a:rPr sz="2500" b="1" i="0">
+              <a:rPr sz="2500" b="0" i="0">
                 <a:solidFill>
                   <a:srgbClr val="FFFDF7"/>
                 </a:solidFill>
-                <a:latin typeface="Libre Caslon Display"/>
+                <a:latin typeface="Georgia"/>
               </a:rPr>
               <a:t>without work.</a:t>
             </a:r>
@@ -6474,7 +6474,7 @@
                 <a:solidFill>
                   <a:srgbClr val="C3D6E2"/>
                 </a:solidFill>
-                <a:latin typeface="Karla"/>
+                <a:latin typeface="Calibri"/>
               </a:rPr>
               <a:t>Two tyres and a repair. If you do not do it you cannot drive it, and for some of you that is how you get to work.</a:t>
             </a:r>
@@ -6628,11 +6628,11 @@
               </a:spcAft>
             </a:pPr>
             <a:r>
-              <a:rPr sz="1450" b="1" i="0">
+              <a:rPr sz="1450" b="0" i="0">
                 <a:solidFill>
                   <a:srgbClr val="2F5470"/>
                 </a:solidFill>
-                <a:latin typeface="Libre Caslon Display"/>
+                <a:latin typeface="Georgia"/>
               </a:rPr>
               <a:t>£280, or no car</a:t>
             </a:r>
@@ -6698,7 +6698,7 @@
                 <a:solidFill>
                   <a:srgbClr val="C3D6E2"/>
                 </a:solidFill>
-                <a:latin typeface="Karla"/>
+                <a:latin typeface="Calibri"/>
               </a:rPr>
               <a:t>The Pastoral Guide</a:t>
             </a:r>
@@ -6740,7 +6740,7 @@
                 <a:solidFill>
                   <a:srgbClr val="C3D6E2"/>
                 </a:solidFill>
-                <a:latin typeface="Karla"/>
+                <a:latin typeface="Calibri"/>
               </a:rPr>
               <a:t>15 / 22</a:t>
             </a:r>
@@ -6844,7 +6844,7 @@
                 <a:solidFill>
                   <a:srgbClr val="C3D6E2"/>
                 </a:solidFill>
-                <a:latin typeface="Karla"/>
+                <a:latin typeface="Calibri"/>
               </a:rPr>
               <a:t>THE NINETEENTH</a:t>
             </a:r>
@@ -6932,7 +6932,7 @@
                 <a:solidFill>
                   <a:srgbClr val="2F5470"/>
                 </a:solidFill>
-                <a:latin typeface="Karla"/>
+                <a:latin typeface="Calibri"/>
               </a:rPr>
               <a:t>EVENT 8 OF 10</a:t>
             </a:r>
@@ -6970,21 +6970,21 @@
               </a:spcAft>
             </a:pPr>
             <a:r>
-              <a:rPr sz="2500" b="1" i="0">
+              <a:rPr sz="2500" b="0" i="0">
                 <a:solidFill>
                   <a:srgbClr val="FFFDF7"/>
                 </a:solidFill>
-                <a:latin typeface="Libre Caslon Display"/>
+                <a:latin typeface="Georgia"/>
               </a:rPr>
               <a:t>The thing you bought on finance</a:t>
             </a:r>
             <a:br/>
             <a:r>
-              <a:rPr sz="2500" b="1" i="0">
+              <a:rPr sz="2500" b="0" i="0">
                 <a:solidFill>
                   <a:srgbClr val="FFFDF7"/>
                 </a:solidFill>
-                <a:latin typeface="Libre Caslon Display"/>
+                <a:latin typeface="Georgia"/>
               </a:rPr>
               <a:t>costs more than it said on the label.</a:t>
             </a:r>
@@ -7026,7 +7026,7 @@
                 <a:solidFill>
                   <a:srgbClr val="C3D6E2"/>
                 </a:solidFill>
-                <a:latin typeface="Karla"/>
+                <a:latin typeface="Calibri"/>
               </a:rPr>
               <a:t>That is interest. You are paying for the privilege of having had it early, and you still owe most of it.</a:t>
             </a:r>
@@ -7180,11 +7180,11 @@
               </a:spcAft>
             </a:pPr>
             <a:r>
-              <a:rPr sz="1450" b="1" i="0">
+              <a:rPr sz="1450" b="0" i="0">
                 <a:solidFill>
                   <a:srgbClr val="2F5470"/>
                 </a:solidFill>
-                <a:latin typeface="Libre Caslon Display"/>
+                <a:latin typeface="Georgia"/>
               </a:rPr>
               <a:t>£45 this month. £320 still owed</a:t>
             </a:r>
@@ -7250,7 +7250,7 @@
                 <a:solidFill>
                   <a:srgbClr val="C3D6E2"/>
                 </a:solidFill>
-                <a:latin typeface="Karla"/>
+                <a:latin typeface="Calibri"/>
               </a:rPr>
               <a:t>The Pastoral Guide</a:t>
             </a:r>
@@ -7292,7 +7292,7 @@
                 <a:solidFill>
                   <a:srgbClr val="C3D6E2"/>
                 </a:solidFill>
-                <a:latin typeface="Karla"/>
+                <a:latin typeface="Calibri"/>
               </a:rPr>
               <a:t>16 / 22</a:t>
             </a:r>
@@ -7396,7 +7396,7 @@
                 <a:solidFill>
                   <a:srgbClr val="C3D6E2"/>
                 </a:solidFill>
-                <a:latin typeface="Karla"/>
+                <a:latin typeface="Calibri"/>
               </a:rPr>
               <a:t>THE TWENTY-FIRST</a:t>
             </a:r>
@@ -7484,7 +7484,7 @@
                 <a:solidFill>
                   <a:srgbClr val="2F5470"/>
                 </a:solidFill>
-                <a:latin typeface="Karla"/>
+                <a:latin typeface="Calibri"/>
               </a:rPr>
               <a:t>EVENT 9 OF 10</a:t>
             </a:r>
@@ -7522,31 +7522,31 @@
               </a:spcAft>
             </a:pPr>
             <a:r>
-              <a:rPr sz="2500" b="1" i="0">
+              <a:rPr sz="2500" b="0" i="0">
                 <a:solidFill>
                   <a:srgbClr val="FFFDF7"/>
                 </a:solidFill>
-                <a:latin typeface="Libre Caslon Display"/>
+                <a:latin typeface="Georgia"/>
               </a:rPr>
               <a:t>A message at eleven at night.</a:t>
             </a:r>
             <a:br/>
             <a:r>
-              <a:rPr sz="2500" b="1" i="0">
+              <a:rPr sz="2500" b="0" i="0">
                 <a:solidFill>
                   <a:srgbClr val="FFFDF7"/>
                 </a:solidFill>
-                <a:latin typeface="Libre Caslon Display"/>
+                <a:latin typeface="Georgia"/>
               </a:rPr>
               <a:t>Your best friend turns eighteen,</a:t>
             </a:r>
             <a:br/>
             <a:r>
-              <a:rPr sz="2500" b="1" i="0">
+              <a:rPr sz="2500" b="0" i="0">
                 <a:solidFill>
                   <a:srgbClr val="FFFDF7"/>
                 </a:solidFill>
-                <a:latin typeface="Libre Caslon Display"/>
+                <a:latin typeface="Georgia"/>
               </a:rPr>
               <a:t>and it is abroad.</a:t>
             </a:r>
@@ -7588,7 +7588,7 @@
                 <a:solidFill>
                   <a:srgbClr val="C3D6E2"/>
                 </a:solidFill>
-                <a:latin typeface="Karla"/>
+                <a:latin typeface="Calibri"/>
               </a:rPr>
               <a:t>Everyone is going. They asked you first, and they are waiting for you to reply. You can say no. People do say no.</a:t>
             </a:r>
@@ -7742,11 +7742,11 @@
               </a:spcAft>
             </a:pPr>
             <a:r>
-              <a:rPr sz="1450" b="1" i="0">
+              <a:rPr sz="1450" b="0" i="0">
                 <a:solidFill>
                   <a:srgbClr val="2F5470"/>
                 </a:solidFill>
-                <a:latin typeface="Libre Caslon Display"/>
+                <a:latin typeface="Georgia"/>
               </a:rPr>
               <a:t>£240, or an awkward conversation</a:t>
             </a:r>
@@ -7812,7 +7812,7 @@
                 <a:solidFill>
                   <a:srgbClr val="C3D6E2"/>
                 </a:solidFill>
-                <a:latin typeface="Karla"/>
+                <a:latin typeface="Calibri"/>
               </a:rPr>
               <a:t>The Pastoral Guide</a:t>
             </a:r>
@@ -7854,7 +7854,7 @@
                 <a:solidFill>
                   <a:srgbClr val="C3D6E2"/>
                 </a:solidFill>
-                <a:latin typeface="Karla"/>
+                <a:latin typeface="Calibri"/>
               </a:rPr>
               <a:t>17 / 22</a:t>
             </a:r>
@@ -7958,7 +7958,7 @@
                 <a:solidFill>
                   <a:srgbClr val="C3D6E2"/>
                 </a:solidFill>
-                <a:latin typeface="Karla"/>
+                <a:latin typeface="Calibri"/>
               </a:rPr>
               <a:t>THE TWENTY-FOURTH</a:t>
             </a:r>
@@ -8046,7 +8046,7 @@
                 <a:solidFill>
                   <a:srgbClr val="2F5470"/>
                 </a:solidFill>
-                <a:latin typeface="Karla"/>
+                <a:latin typeface="Calibri"/>
               </a:rPr>
               <a:t>EVENT 10 OF 10</a:t>
             </a:r>
@@ -8084,11 +8084,11 @@
               </a:spcAft>
             </a:pPr>
             <a:r>
-              <a:rPr sz="2500" b="1" i="0">
+              <a:rPr sz="2500" b="0" i="0">
                 <a:solidFill>
                   <a:srgbClr val="FFFDF7"/>
                 </a:solidFill>
-                <a:latin typeface="Libre Caslon Display"/>
+                <a:latin typeface="Georgia"/>
               </a:rPr>
               <a:t>You are offered overtime.</a:t>
             </a:r>
@@ -8130,7 +8130,7 @@
                 <a:solidFill>
                   <a:srgbClr val="C3D6E2"/>
                 </a:solidFill>
-                <a:latin typeface="Karla"/>
+                <a:latin typeface="Calibri"/>
               </a:rPr>
               <a:t>Two of your weekends, gone. The money is real and so are the weekends. Nobody else can decide this one for you.</a:t>
             </a:r>
@@ -8284,11 +8284,11 @@
               </a:spcAft>
             </a:pPr>
             <a:r>
-              <a:rPr sz="1450" b="1" i="0">
+              <a:rPr sz="1450" b="0" i="0">
                 <a:solidFill>
                   <a:srgbClr val="2F5470"/>
                 </a:solidFill>
-                <a:latin typeface="Libre Caslon Display"/>
+                <a:latin typeface="Georgia"/>
               </a:rPr>
               <a:t>Take £180, lose two weekends</a:t>
             </a:r>
@@ -8354,7 +8354,7 @@
                 <a:solidFill>
                   <a:srgbClr val="C3D6E2"/>
                 </a:solidFill>
-                <a:latin typeface="Karla"/>
+                <a:latin typeface="Calibri"/>
               </a:rPr>
               <a:t>The Pastoral Guide</a:t>
             </a:r>
@@ -8396,7 +8396,7 @@
                 <a:solidFill>
                   <a:srgbClr val="C3D6E2"/>
                 </a:solidFill>
-                <a:latin typeface="Karla"/>
+                <a:latin typeface="Calibri"/>
               </a:rPr>
               <a:t>18 / 22</a:t>
             </a:r>
@@ -8500,7 +8500,7 @@
                 <a:solidFill>
                   <a:srgbClr val="7EA6BD"/>
                 </a:solidFill>
-                <a:latin typeface="Karla"/>
+                <a:latin typeface="Calibri"/>
               </a:rPr>
               <a:t>THE TWENTY-SEVENTH</a:t>
             </a:r>
@@ -8538,11 +8538,11 @@
               </a:spcAft>
             </a:pPr>
             <a:r>
-              <a:rPr sz="3200" b="1" i="0">
+              <a:rPr sz="3200" b="0" i="0">
                 <a:solidFill>
                   <a:srgbClr val="39424A"/>
                 </a:solidFill>
-                <a:latin typeface="Libre Caslon Display"/>
+                <a:latin typeface="Georgia"/>
               </a:rPr>
               <a:t>Count what is left</a:t>
             </a:r>
@@ -8584,7 +8584,7 @@
                 <a:solidFill>
                   <a:srgbClr val="6B7681"/>
                 </a:solidFill>
-                <a:latin typeface="Karla"/>
+                <a:latin typeface="Calibri"/>
               </a:rPr>
               <a:t>One day to go. Put what you have left in the middle of the table where everybody can see it.</a:t>
             </a:r>
@@ -8714,11 +8714,11 @@
               </a:spcAft>
             </a:pPr>
             <a:r>
-              <a:rPr sz="1300" b="1" i="0">
+              <a:rPr sz="1300" b="0" i="0">
                 <a:solidFill>
                   <a:srgbClr val="FFFDF7"/>
                 </a:solidFill>
-                <a:latin typeface="Libre Caslon Display"/>
+                <a:latin typeface="Georgia"/>
               </a:rPr>
               <a:t>1</a:t>
             </a:r>
@@ -8760,7 +8760,7 @@
                 <a:solidFill>
                   <a:srgbClr val="39424A"/>
                 </a:solidFill>
-                <a:latin typeface="Karla"/>
+                <a:latin typeface="Calibri"/>
               </a:rPr>
               <a:t>What did you cut first, and why that?</a:t>
             </a:r>
@@ -8890,11 +8890,11 @@
               </a:spcAft>
             </a:pPr>
             <a:r>
-              <a:rPr sz="1300" b="1" i="0">
+              <a:rPr sz="1300" b="0" i="0">
                 <a:solidFill>
                   <a:srgbClr val="FFFDF7"/>
                 </a:solidFill>
-                <a:latin typeface="Libre Caslon Display"/>
+                <a:latin typeface="Georgia"/>
               </a:rPr>
               <a:t>2</a:t>
             </a:r>
@@ -8936,7 +8936,7 @@
                 <a:solidFill>
                   <a:srgbClr val="39424A"/>
                 </a:solidFill>
-                <a:latin typeface="Karla"/>
+                <a:latin typeface="Calibri"/>
               </a:rPr>
               <a:t>What did you refuse to cut, even when it got tight?</a:t>
             </a:r>
@@ -9066,11 +9066,11 @@
               </a:spcAft>
             </a:pPr>
             <a:r>
-              <a:rPr sz="1300" b="1" i="0">
+              <a:rPr sz="1300" b="0" i="0">
                 <a:solidFill>
                   <a:srgbClr val="FFFDF7"/>
                 </a:solidFill>
-                <a:latin typeface="Libre Caslon Display"/>
+                <a:latin typeface="Georgia"/>
               </a:rPr>
               <a:t>3</a:t>
             </a:r>
@@ -9112,7 +9112,7 @@
                 <a:solidFill>
                   <a:srgbClr val="39424A"/>
                 </a:solidFill>
-                <a:latin typeface="Karla"/>
+                <a:latin typeface="Calibri"/>
               </a:rPr>
               <a:t>Did you keep the money you said you would save? Honestly?</a:t>
             </a:r>
@@ -9154,7 +9154,7 @@
                 <a:solidFill>
                   <a:srgbClr val="6B7681"/>
                 </a:solidFill>
-                <a:latin typeface="Karla"/>
+                <a:latin typeface="Calibri"/>
               </a:rPr>
               <a:t>The second question is the interesting one.</a:t>
             </a:r>
@@ -9220,7 +9220,7 @@
                 <a:solidFill>
                   <a:srgbClr val="A2ACB5"/>
                 </a:solidFill>
-                <a:latin typeface="Karla"/>
+                <a:latin typeface="Calibri"/>
               </a:rPr>
               <a:t>The Pastoral Guide</a:t>
             </a:r>
@@ -9262,7 +9262,7 @@
                 <a:solidFill>
                   <a:srgbClr val="A2ACB5"/>
                 </a:solidFill>
-                <a:latin typeface="Karla"/>
+                <a:latin typeface="Calibri"/>
               </a:rPr>
               <a:t>19 / 22</a:t>
             </a:r>
@@ -9412,7 +9412,7 @@
                 <a:solidFill>
                   <a:srgbClr val="2F5470"/>
                 </a:solidFill>
-                <a:latin typeface="Karla"/>
+                <a:latin typeface="Calibri"/>
               </a:rPr>
               <a:t>TEACHER SLIDE  ·  SKIP IT</a:t>
             </a:r>
@@ -9454,7 +9454,7 @@
                 <a:solidFill>
                   <a:srgbClr val="7EA6BD"/>
                 </a:solidFill>
-                <a:latin typeface="Karla"/>
+                <a:latin typeface="Calibri"/>
               </a:rPr>
               <a:t>BEFORE YOU START</a:t>
             </a:r>
@@ -9492,11 +9492,11 @@
               </a:spcAft>
             </a:pPr>
             <a:r>
-              <a:rPr sz="3100" b="1" i="0">
+              <a:rPr sz="3100" b="0" i="0">
                 <a:solidFill>
                   <a:srgbClr val="39424A"/>
                 </a:solidFill>
-                <a:latin typeface="Libre Caslon Display"/>
+                <a:latin typeface="Georgia"/>
               </a:rPr>
               <a:t>Two ways to run this</a:t>
             </a:r>
@@ -9586,7 +9586,7 @@
                 <a:solidFill>
                   <a:srgbClr val="7EA6BD"/>
                 </a:solidFill>
-                <a:latin typeface="Karla"/>
+                <a:latin typeface="Calibri"/>
               </a:rPr>
               <a:t>BASIC</a:t>
             </a:r>
@@ -9624,11 +9624,11 @@
               </a:spcAft>
             </a:pPr>
             <a:r>
-              <a:rPr sz="1700" b="1" i="0">
+              <a:rPr sz="1700" b="0" i="0">
                 <a:solidFill>
                   <a:srgbClr val="2F5470"/>
                 </a:solidFill>
-                <a:latin typeface="Libre Caslon Display"/>
+                <a:latin typeface="Georgia"/>
               </a:rPr>
               <a:t>Pen and paper</a:t>
             </a:r>
@@ -9670,7 +9670,7 @@
                 <a:solidFill>
                   <a:srgbClr val="7EA6BD"/>
                 </a:solidFill>
-                <a:latin typeface="Karla"/>
+                <a:latin typeface="Calibri"/>
               </a:rPr>
               <a:t>·</a:t>
             </a:r>
@@ -9712,7 +9712,7 @@
                 <a:solidFill>
                   <a:srgbClr val="6B7681"/>
                 </a:solidFill>
-                <a:latin typeface="Karla"/>
+                <a:latin typeface="Calibri"/>
               </a:rPr>
               <a:t>Print the job cards and one budget sheet per group.</a:t>
             </a:r>
@@ -9754,7 +9754,7 @@
                 <a:solidFill>
                   <a:srgbClr val="7EA6BD"/>
                 </a:solidFill>
-                <a:latin typeface="Karla"/>
+                <a:latin typeface="Calibri"/>
               </a:rPr>
               <a:t>·</a:t>
             </a:r>
@@ -9796,7 +9796,7 @@
                 <a:solidFill>
                   <a:srgbClr val="6B7681"/>
                 </a:solidFill>
-                <a:latin typeface="Karla"/>
+                <a:latin typeface="Calibri"/>
               </a:rPr>
               <a:t>Groups write their choices and subtract as they go.</a:t>
             </a:r>
@@ -9838,7 +9838,7 @@
                 <a:solidFill>
                   <a:srgbClr val="7EA6BD"/>
                 </a:solidFill>
-                <a:latin typeface="Karla"/>
+                <a:latin typeface="Calibri"/>
               </a:rPr>
               <a:t>·</a:t>
             </a:r>
@@ -9880,7 +9880,7 @@
                 <a:solidFill>
                   <a:srgbClr val="6B7681"/>
                 </a:solidFill>
-                <a:latin typeface="Karla"/>
+                <a:latin typeface="Calibri"/>
               </a:rPr>
               <a:t>Use three of the ten events. Skip the shop.</a:t>
             </a:r>
@@ -9970,7 +9970,7 @@
                 <a:solidFill>
                   <a:srgbClr val="7EA6BD"/>
                 </a:solidFill>
-                <a:latin typeface="Karla"/>
+                <a:latin typeface="Calibri"/>
               </a:rPr>
               <a:t>FULL</a:t>
             </a:r>
@@ -10008,11 +10008,11 @@
               </a:spcAft>
             </a:pPr>
             <a:r>
-              <a:rPr sz="1700" b="1" i="0">
+              <a:rPr sz="1700" b="0" i="0">
                 <a:solidFill>
                   <a:srgbClr val="2F5470"/>
                 </a:solidFill>
-                <a:latin typeface="Libre Caslon Display"/>
+                <a:latin typeface="Georgia"/>
               </a:rPr>
               <a:t>Cash and a shop</a:t>
             </a:r>
@@ -10054,7 +10054,7 @@
                 <a:solidFill>
                   <a:srgbClr val="7EA6BD"/>
                 </a:solidFill>
-                <a:latin typeface="Karla"/>
+                <a:latin typeface="Calibri"/>
               </a:rPr>
               <a:t>·</a:t>
             </a:r>
@@ -10096,7 +10096,7 @@
                 <a:solidFill>
                   <a:srgbClr val="6B7681"/>
                 </a:solidFill>
-                <a:latin typeface="Karla"/>
+                <a:latin typeface="Calibri"/>
               </a:rPr>
               <a:t>Also print the cash sheets and the shop cards.</a:t>
             </a:r>
@@ -10138,7 +10138,7 @@
                 <a:solidFill>
                   <a:srgbClr val="7EA6BD"/>
                 </a:solidFill>
-                <a:latin typeface="Karla"/>
+                <a:latin typeface="Calibri"/>
               </a:rPr>
               <a:t>·</a:t>
             </a:r>
@@ -10180,7 +10180,7 @@
                 <a:solidFill>
                   <a:srgbClr val="6B7681"/>
                 </a:solidFill>
-                <a:latin typeface="Karla"/>
+                <a:latin typeface="Calibri"/>
               </a:rPr>
               <a:t>Groups pay with notes and buy from the shop.</a:t>
             </a:r>
@@ -10222,7 +10222,7 @@
                 <a:solidFill>
                   <a:srgbClr val="7EA6BD"/>
                 </a:solidFill>
-                <a:latin typeface="Karla"/>
+                <a:latin typeface="Calibri"/>
               </a:rPr>
               <a:t>·</a:t>
             </a:r>
@@ -10264,7 +10264,7 @@
                 <a:solidFill>
                   <a:srgbClr val="6B7681"/>
                 </a:solidFill>
-                <a:latin typeface="Karla"/>
+                <a:latin typeface="Calibri"/>
               </a:rPr>
               <a:t>Use six or more events. Needs the full hour.</a:t>
             </a:r>
@@ -10306,7 +10306,7 @@
                 <a:solidFill>
                   <a:srgbClr val="6B7681"/>
                 </a:solidFill>
-                <a:latin typeface="Karla"/>
+                <a:latin typeface="Calibri"/>
               </a:rPr>
               <a:t>Everything else in this deck works either way.</a:t>
             </a:r>
@@ -10372,7 +10372,7 @@
                 <a:solidFill>
                   <a:srgbClr val="A2ACB5"/>
                 </a:solidFill>
-                <a:latin typeface="Karla"/>
+                <a:latin typeface="Calibri"/>
               </a:rPr>
               <a:t>The Pastoral Guide</a:t>
             </a:r>
@@ -10414,7 +10414,7 @@
                 <a:solidFill>
                   <a:srgbClr val="A2ACB5"/>
                 </a:solidFill>
-                <a:latin typeface="Karla"/>
+                <a:latin typeface="Calibri"/>
               </a:rPr>
               <a:t>2 / 22</a:t>
             </a:r>
@@ -10518,7 +10518,7 @@
                 <a:solidFill>
                   <a:srgbClr val="7EA6BD"/>
                 </a:solidFill>
-                <a:latin typeface="Karla"/>
+                <a:latin typeface="Calibri"/>
               </a:rPr>
               <a:t>THE THING NOBODY TELLS YOU</a:t>
             </a:r>
@@ -10556,11 +10556,11 @@
               </a:spcAft>
             </a:pPr>
             <a:r>
-              <a:rPr sz="2700" b="1" i="0">
+              <a:rPr sz="2700" b="0" i="0">
                 <a:solidFill>
                   <a:srgbClr val="39424A"/>
                 </a:solidFill>
-                <a:latin typeface="Libre Caslon Display"/>
+                <a:latin typeface="Georgia"/>
               </a:rPr>
               <a:t>It is not about being bad with money</a:t>
             </a:r>
@@ -10646,11 +10646,11 @@
               </a:spcAft>
             </a:pPr>
             <a:r>
-              <a:rPr sz="1550" b="1" i="0">
+              <a:rPr sz="1550" b="0" i="0">
                 <a:solidFill>
                   <a:srgbClr val="2F5470"/>
                 </a:solidFill>
-                <a:latin typeface="Libre Caslon Display"/>
+                <a:latin typeface="Georgia"/>
               </a:rPr>
               <a:t>Most of it is decided before you get a choice.</a:t>
             </a:r>
@@ -10692,7 +10692,7 @@
                 <a:solidFill>
                   <a:srgbClr val="6B7681"/>
                 </a:solidFill>
-                <a:latin typeface="Karla"/>
+                <a:latin typeface="Calibri"/>
               </a:rPr>
               <a:t>Somewhere to live, bills and getting to work are gone before you have bought anything at all. What is left is the part everybody argues about, and it is the smallest part.</a:t>
             </a:r>
@@ -10778,11 +10778,11 @@
               </a:spcAft>
             </a:pPr>
             <a:r>
-              <a:rPr sz="1550" b="1" i="0">
+              <a:rPr sz="1550" b="0" i="0">
                 <a:solidFill>
                   <a:srgbClr val="2F5470"/>
                 </a:solidFill>
-                <a:latin typeface="Libre Caslon Display"/>
+                <a:latin typeface="Georgia"/>
               </a:rPr>
               <a:t>Every choice removes another one.</a:t>
             </a:r>
@@ -10824,7 +10824,7 @@
                 <a:solidFill>
                   <a:srgbClr val="6B7681"/>
                 </a:solidFill>
-                <a:latin typeface="Karla"/>
+                <a:latin typeface="Calibri"/>
               </a:rPr>
               <a:t>A car lets you live further out, where rent is cheaper, but then there is nothing to save. Nothing here is wrong. You only get to pick some of it.</a:t>
             </a:r>
@@ -10890,7 +10890,7 @@
                 <a:solidFill>
                   <a:srgbClr val="A2ACB5"/>
                 </a:solidFill>
-                <a:latin typeface="Karla"/>
+                <a:latin typeface="Calibri"/>
               </a:rPr>
               <a:t>The Pastoral Guide</a:t>
             </a:r>
@@ -10932,7 +10932,7 @@
                 <a:solidFill>
                   <a:srgbClr val="A2ACB5"/>
                 </a:solidFill>
-                <a:latin typeface="Karla"/>
+                <a:latin typeface="Calibri"/>
               </a:rPr>
               <a:t>20 / 22</a:t>
             </a:r>
@@ -11036,7 +11036,7 @@
                 <a:solidFill>
                   <a:srgbClr val="C3D6E2"/>
                 </a:solidFill>
-                <a:latin typeface="Karla"/>
+                <a:latin typeface="Calibri"/>
               </a:rPr>
               <a:t>IF YOU REMEMBER ONE THING</a:t>
             </a:r>
@@ -11074,31 +11074,31 @@
               </a:spcAft>
             </a:pPr>
             <a:r>
-              <a:rPr sz="3000" b="1" i="0">
+              <a:rPr sz="3000" b="0" i="0">
                 <a:solidFill>
                   <a:srgbClr val="FFFDF7"/>
                 </a:solidFill>
-                <a:latin typeface="Libre Caslon Display"/>
+                <a:latin typeface="Georgia"/>
               </a:rPr>
               <a:t>Work out what has to leave</a:t>
             </a:r>
             <a:br/>
             <a:r>
-              <a:rPr sz="3000" b="1" i="0">
+              <a:rPr sz="3000" b="0" i="0">
                 <a:solidFill>
                   <a:srgbClr val="FFFDF7"/>
                 </a:solidFill>
-                <a:latin typeface="Libre Caslon Display"/>
+                <a:latin typeface="Georgia"/>
               </a:rPr>
               <a:t>your account before you</a:t>
             </a:r>
             <a:br/>
             <a:r>
-              <a:rPr sz="3000" b="1" i="0">
+              <a:rPr sz="3000" b="0" i="0">
                 <a:solidFill>
                   <a:srgbClr val="FFFDF7"/>
                 </a:solidFill>
-                <a:latin typeface="Libre Caslon Display"/>
+                <a:latin typeface="Georgia"/>
               </a:rPr>
               <a:t>decide what you can afford.</a:t>
             </a:r>
@@ -11184,7 +11184,7 @@
                 <a:solidFill>
                   <a:srgbClr val="C3D6E2"/>
                 </a:solidFill>
-                <a:latin typeface="Karla"/>
+                <a:latin typeface="Calibri"/>
               </a:rPr>
               <a:t>Everyone who is good with money does this. It is not willpower and it is not spreadsheets.</a:t>
             </a:r>
@@ -11250,7 +11250,7 @@
                 <a:solidFill>
                   <a:srgbClr val="C3D6E2"/>
                 </a:solidFill>
-                <a:latin typeface="Karla"/>
+                <a:latin typeface="Calibri"/>
               </a:rPr>
               <a:t>The Pastoral Guide</a:t>
             </a:r>
@@ -11292,7 +11292,7 @@
                 <a:solidFill>
                   <a:srgbClr val="C3D6E2"/>
                 </a:solidFill>
-                <a:latin typeface="Karla"/>
+                <a:latin typeface="Calibri"/>
               </a:rPr>
               <a:t>21 / 22</a:t>
             </a:r>
@@ -11416,11 +11416,11 @@
               </a:spcAft>
             </a:pPr>
             <a:r>
-              <a:rPr sz="3400" b="1" i="0">
+              <a:rPr sz="3400" b="0" i="0">
                 <a:solidFill>
                   <a:srgbClr val="2F5470"/>
                 </a:solidFill>
-                <a:latin typeface="Libre Caslon Display"/>
+                <a:latin typeface="Georgia"/>
               </a:rPr>
               <a:t>Nobody gets taught this.</a:t>
             </a:r>
@@ -11462,7 +11462,7 @@
                 <a:solidFill>
                   <a:srgbClr val="6B7681"/>
                 </a:solidFill>
-                <a:latin typeface="Karla"/>
+                <a:latin typeface="Calibri"/>
               </a:rPr>
               <a:t>Most people work it out in their first year of doing it for real, usually the hard way. You have just had an hour of practice that did not cost you anything.</a:t>
             </a:r>
@@ -11504,7 +11504,7 @@
                 <a:solidFill>
                   <a:srgbClr val="A2ACB5"/>
                 </a:solidFill>
-                <a:latin typeface="Karla"/>
+                <a:latin typeface="Calibri"/>
               </a:rPr>
               <a:t>Payday  ·  A budgeting lesson</a:t>
             </a:r>
@@ -11570,7 +11570,7 @@
                 <a:solidFill>
                   <a:srgbClr val="A2ACB5"/>
                 </a:solidFill>
-                <a:latin typeface="Karla"/>
+                <a:latin typeface="Calibri"/>
               </a:rPr>
               <a:t>The Pastoral Guide</a:t>
             </a:r>
@@ -11612,7 +11612,7 @@
                 <a:solidFill>
                   <a:srgbClr val="A2ACB5"/>
                 </a:solidFill>
-                <a:latin typeface="Karla"/>
+                <a:latin typeface="Calibri"/>
               </a:rPr>
               <a:t>22 / 22</a:t>
             </a:r>
@@ -11716,7 +11716,7 @@
                 <a:solidFill>
                   <a:srgbClr val="C3D6E2"/>
                 </a:solidFill>
-                <a:latin typeface="Karla"/>
+                <a:latin typeface="Calibri"/>
               </a:rPr>
               <a:t>THE TWENTY-EIGHTH</a:t>
             </a:r>
@@ -11754,31 +11754,31 @@
               </a:spcAft>
             </a:pPr>
             <a:r>
-              <a:rPr sz="2500" b="1" i="0">
+              <a:rPr sz="2500" b="0" i="0">
                 <a:solidFill>
                   <a:srgbClr val="FFFDF7"/>
                 </a:solidFill>
-                <a:latin typeface="Libre Caslon Display"/>
+                <a:latin typeface="Georgia"/>
               </a:rPr>
               <a:t>It is 7.04 in the morning and your phone buzzes on the pillow next to you.</a:t>
             </a:r>
             <a:br/>
             <a:r>
-              <a:rPr sz="2500" b="1" i="0">
+              <a:rPr sz="2500" b="0" i="0">
                 <a:solidFill>
                   <a:srgbClr val="FFFDF7"/>
                 </a:solidFill>
-                <a:latin typeface="Libre Caslon Display"/>
+                <a:latin typeface="Georgia"/>
               </a:rPr>
               <a:t>Your wages have landed.</a:t>
             </a:r>
             <a:br/>
             <a:r>
-              <a:rPr sz="2500" b="1" i="0">
+              <a:rPr sz="2500" b="0" i="0">
                 <a:solidFill>
                   <a:srgbClr val="FFFDF7"/>
                 </a:solidFill>
-                <a:latin typeface="Libre Caslon Display"/>
+                <a:latin typeface="Georgia"/>
               </a:rPr>
               <a:t>First proper month. First proper pay.</a:t>
             </a:r>
@@ -11864,7 +11864,7 @@
                 <a:solidFill>
                   <a:srgbClr val="C3D6E2"/>
                 </a:solidFill>
-                <a:latin typeface="Karla"/>
+                <a:latin typeface="Calibri"/>
               </a:rPr>
               <a:t>You already know what you are going to spend some of it on. You have known for about a fortnight.</a:t>
             </a:r>
@@ -11930,7 +11930,7 @@
                 <a:solidFill>
                   <a:srgbClr val="C3D6E2"/>
                 </a:solidFill>
-                <a:latin typeface="Karla"/>
+                <a:latin typeface="Calibri"/>
               </a:rPr>
               <a:t>The Pastoral Guide</a:t>
             </a:r>
@@ -11972,7 +11972,7 @@
                 <a:solidFill>
                   <a:srgbClr val="C3D6E2"/>
                 </a:solidFill>
-                <a:latin typeface="Karla"/>
+                <a:latin typeface="Calibri"/>
               </a:rPr>
               <a:t>3 / 22</a:t>
             </a:r>
@@ -12076,7 +12076,7 @@
                 <a:solidFill>
                   <a:srgbClr val="7EA6BD"/>
                 </a:solidFill>
-                <a:latin typeface="Karla"/>
+                <a:latin typeface="Calibri"/>
               </a:rPr>
               <a:t>THEN YOU OPEN IT</a:t>
             </a:r>
@@ -12114,11 +12114,11 @@
               </a:spcAft>
             </a:pPr>
             <a:r>
-              <a:rPr sz="3100" b="1" i="0">
+              <a:rPr sz="3100" b="0" i="0">
                 <a:solidFill>
                   <a:srgbClr val="39424A"/>
                 </a:solidFill>
-                <a:latin typeface="Libre Caslon Display"/>
+                <a:latin typeface="Georgia"/>
               </a:rPr>
               <a:t>Told one number. Paid another.</a:t>
             </a:r>
@@ -12208,7 +12208,7 @@
                 <a:solidFill>
                   <a:srgbClr val="39424A"/>
                 </a:solidFill>
-                <a:latin typeface="Karla"/>
+                <a:latin typeface="Calibri"/>
               </a:rPr>
               <a:t>The salary in the advert</a:t>
             </a:r>
@@ -12246,11 +12246,11 @@
               </a:spcAft>
             </a:pPr>
             <a:r>
-              <a:rPr sz="1700" b="1" i="0">
+              <a:rPr sz="1700" b="0" i="0">
                 <a:solidFill>
                   <a:srgbClr val="2F5470"/>
                 </a:solidFill>
-                <a:latin typeface="Libre Caslon Display"/>
+                <a:latin typeface="Georgia"/>
               </a:rPr>
               <a:t>£24,000 a year</a:t>
             </a:r>
@@ -12340,7 +12340,7 @@
                 <a:solidFill>
                   <a:srgbClr val="39424A"/>
                 </a:solidFill>
-                <a:latin typeface="Karla"/>
+                <a:latin typeface="Calibri"/>
               </a:rPr>
               <a:t>Which sounds like</a:t>
             </a:r>
@@ -12378,11 +12378,11 @@
               </a:spcAft>
             </a:pPr>
             <a:r>
-              <a:rPr sz="1700" b="1" i="0">
+              <a:rPr sz="1700" b="0" i="0">
                 <a:solidFill>
                   <a:srgbClr val="2F5470"/>
                 </a:solidFill>
-                <a:latin typeface="Libre Caslon Display"/>
+                <a:latin typeface="Georgia"/>
               </a:rPr>
               <a:t>£2,000 a month</a:t>
             </a:r>
@@ -12472,7 +12472,7 @@
                 <a:solidFill>
                   <a:srgbClr val="39424A"/>
                 </a:solidFill>
-                <a:latin typeface="Karla"/>
+                <a:latin typeface="Calibri"/>
               </a:rPr>
               <a:t>What actually lands</a:t>
             </a:r>
@@ -12510,11 +12510,11 @@
               </a:spcAft>
             </a:pPr>
             <a:r>
-              <a:rPr sz="1700" b="1" i="0">
+              <a:rPr sz="1700" b="0" i="0">
                 <a:solidFill>
                   <a:srgbClr val="2F5470"/>
                 </a:solidFill>
-                <a:latin typeface="Libre Caslon Display"/>
+                <a:latin typeface="Georgia"/>
               </a:rPr>
               <a:t>£1,730</a:t>
             </a:r>
@@ -12556,7 +12556,7 @@
                 <a:solidFill>
                   <a:srgbClr val="6B7681"/>
                 </a:solidFill>
-                <a:latin typeface="Karla"/>
+                <a:latin typeface="Calibri"/>
               </a:rPr>
               <a:t>Tax and deductions. Two hundred and seventy pounds you never see.</a:t>
             </a:r>
@@ -12622,7 +12622,7 @@
                 <a:solidFill>
                   <a:srgbClr val="A2ACB5"/>
                 </a:solidFill>
-                <a:latin typeface="Karla"/>
+                <a:latin typeface="Calibri"/>
               </a:rPr>
               <a:t>The Pastoral Guide</a:t>
             </a:r>
@@ -12664,7 +12664,7 @@
                 <a:solidFill>
                   <a:srgbClr val="A2ACB5"/>
                 </a:solidFill>
-                <a:latin typeface="Karla"/>
+                <a:latin typeface="Calibri"/>
               </a:rPr>
               <a:t>4 / 22</a:t>
             </a:r>
@@ -12768,7 +12768,7 @@
                 <a:solidFill>
                   <a:srgbClr val="7EA6BD"/>
                 </a:solidFill>
-                <a:latin typeface="Karla"/>
+                <a:latin typeface="Calibri"/>
               </a:rPr>
               <a:t>YOUR GROUP</a:t>
             </a:r>
@@ -12806,11 +12806,11 @@
               </a:spcAft>
             </a:pPr>
             <a:r>
-              <a:rPr sz="3200" b="1" i="0">
+              <a:rPr sz="3200" b="0" i="0">
                 <a:solidFill>
                   <a:srgbClr val="39424A"/>
                 </a:solidFill>
-                <a:latin typeface="Libre Caslon Display"/>
+                <a:latin typeface="Georgia"/>
               </a:rPr>
               <a:t>Take a job card</a:t>
             </a:r>
@@ -12852,7 +12852,7 @@
                 <a:solidFill>
                   <a:srgbClr val="6B7681"/>
                 </a:solidFill>
-                <a:latin typeface="Karla"/>
+                <a:latin typeface="Calibri"/>
               </a:rPr>
               <a:t>Six jobs. Different wages, and each one comes with something to deal with.</a:t>
             </a:r>
@@ -12938,11 +12938,11 @@
               </a:spcAft>
             </a:pPr>
             <a:r>
-              <a:rPr sz="1250" b="1" i="0">
+              <a:rPr sz="1250" b="0" i="0">
                 <a:solidFill>
                   <a:srgbClr val="39424A"/>
                 </a:solidFill>
-                <a:latin typeface="Libre Caslon Display"/>
+                <a:latin typeface="Georgia"/>
               </a:rPr>
               <a:t>Apprentice mechanic</a:t>
             </a:r>
@@ -12980,11 +12980,11 @@
               </a:spcAft>
             </a:pPr>
             <a:r>
-              <a:rPr sz="1700" b="1" i="0">
+              <a:rPr sz="1700" b="0" i="0">
                 <a:solidFill>
                   <a:srgbClr val="2F5470"/>
                 </a:solidFill>
-                <a:latin typeface="Libre Caslon Display"/>
+                <a:latin typeface="Georgia"/>
               </a:rPr>
               <a:t>£1,280 a month</a:t>
             </a:r>
@@ -13070,11 +13070,11 @@
               </a:spcAft>
             </a:pPr>
             <a:r>
-              <a:rPr sz="1250" b="1" i="0">
+              <a:rPr sz="1250" b="0" i="0">
                 <a:solidFill>
                   <a:srgbClr val="39424A"/>
                 </a:solidFill>
-                <a:latin typeface="Libre Caslon Display"/>
+                <a:latin typeface="Georgia"/>
               </a:rPr>
               <a:t>Trainee nurse</a:t>
             </a:r>
@@ -13112,11 +13112,11 @@
               </a:spcAft>
             </a:pPr>
             <a:r>
-              <a:rPr sz="1700" b="1" i="0">
+              <a:rPr sz="1700" b="0" i="0">
                 <a:solidFill>
                   <a:srgbClr val="2F5470"/>
                 </a:solidFill>
-                <a:latin typeface="Libre Caslon Display"/>
+                <a:latin typeface="Georgia"/>
               </a:rPr>
               <a:t>£1,450 a month</a:t>
             </a:r>
@@ -13202,11 +13202,11 @@
               </a:spcAft>
             </a:pPr>
             <a:r>
-              <a:rPr sz="1250" b="1" i="0">
+              <a:rPr sz="1250" b="0" i="0">
                 <a:solidFill>
                   <a:srgbClr val="39424A"/>
                 </a:solidFill>
-                <a:latin typeface="Libre Caslon Display"/>
+                <a:latin typeface="Georgia"/>
               </a:rPr>
               <a:t>Retail assistant</a:t>
             </a:r>
@@ -13244,11 +13244,11 @@
               </a:spcAft>
             </a:pPr>
             <a:r>
-              <a:rPr sz="1700" b="1" i="0">
+              <a:rPr sz="1700" b="0" i="0">
                 <a:solidFill>
                   <a:srgbClr val="2F5470"/>
                 </a:solidFill>
-                <a:latin typeface="Libre Caslon Display"/>
+                <a:latin typeface="Georgia"/>
               </a:rPr>
               <a:t>£1,380 a month</a:t>
             </a:r>
@@ -13334,11 +13334,11 @@
               </a:spcAft>
             </a:pPr>
             <a:r>
-              <a:rPr sz="1250" b="1" i="0">
+              <a:rPr sz="1250" b="0" i="0">
                 <a:solidFill>
                   <a:srgbClr val="39424A"/>
                 </a:solidFill>
-                <a:latin typeface="Libre Caslon Display"/>
+                <a:latin typeface="Georgia"/>
               </a:rPr>
               <a:t>Office assistant</a:t>
             </a:r>
@@ -13376,11 +13376,11 @@
               </a:spcAft>
             </a:pPr>
             <a:r>
-              <a:rPr sz="1700" b="1" i="0">
+              <a:rPr sz="1700" b="0" i="0">
                 <a:solidFill>
                   <a:srgbClr val="2F5470"/>
                 </a:solidFill>
-                <a:latin typeface="Libre Caslon Display"/>
+                <a:latin typeface="Georgia"/>
               </a:rPr>
               <a:t>£1,730 a month</a:t>
             </a:r>
@@ -13466,11 +13466,11 @@
               </a:spcAft>
             </a:pPr>
             <a:r>
-              <a:rPr sz="1250" b="1" i="0">
+              <a:rPr sz="1250" b="0" i="0">
                 <a:solidFill>
                   <a:srgbClr val="39424A"/>
                 </a:solidFill>
-                <a:latin typeface="Libre Caslon Display"/>
+                <a:latin typeface="Georgia"/>
               </a:rPr>
               <a:t>Site supervisor</a:t>
             </a:r>
@@ -13508,11 +13508,11 @@
               </a:spcAft>
             </a:pPr>
             <a:r>
-              <a:rPr sz="1700" b="1" i="0">
+              <a:rPr sz="1700" b="0" i="0">
                 <a:solidFill>
                   <a:srgbClr val="2F5470"/>
                 </a:solidFill>
-                <a:latin typeface="Libre Caslon Display"/>
+                <a:latin typeface="Georgia"/>
               </a:rPr>
               <a:t>£2,050 a month</a:t>
             </a:r>
@@ -13598,11 +13598,11 @@
               </a:spcAft>
             </a:pPr>
             <a:r>
-              <a:rPr sz="1250" b="1" i="0">
+              <a:rPr sz="1250" b="0" i="0">
                 <a:solidFill>
                   <a:srgbClr val="39424A"/>
                 </a:solidFill>
-                <a:latin typeface="Libre Caslon Display"/>
+                <a:latin typeface="Georgia"/>
               </a:rPr>
               <a:t>Junior developer</a:t>
             </a:r>
@@ -13640,11 +13640,11 @@
               </a:spcAft>
             </a:pPr>
             <a:r>
-              <a:rPr sz="1700" b="1" i="0">
+              <a:rPr sz="1700" b="0" i="0">
                 <a:solidFill>
                   <a:srgbClr val="2F5470"/>
                 </a:solidFill>
-                <a:latin typeface="Libre Caslon Display"/>
+                <a:latin typeface="Georgia"/>
               </a:rPr>
               <a:t>£2,400 a month</a:t>
             </a:r>
@@ -13686,7 +13686,7 @@
                 <a:solidFill>
                   <a:srgbClr val="2F5470"/>
                 </a:solidFill>
-                <a:latin typeface="Karla"/>
+                <a:latin typeface="Calibri"/>
               </a:rPr>
               <a:t>The best-paid job is not the easiest month. You will see why.</a:t>
             </a:r>
@@ -13752,7 +13752,7 @@
                 <a:solidFill>
                   <a:srgbClr val="A2ACB5"/>
                 </a:solidFill>
-                <a:latin typeface="Karla"/>
+                <a:latin typeface="Calibri"/>
               </a:rPr>
               <a:t>The Pastoral Guide</a:t>
             </a:r>
@@ -13794,7 +13794,7 @@
                 <a:solidFill>
                   <a:srgbClr val="A2ACB5"/>
                 </a:solidFill>
-                <a:latin typeface="Karla"/>
+                <a:latin typeface="Calibri"/>
               </a:rPr>
               <a:t>5 / 22</a:t>
             </a:r>
@@ -13898,7 +13898,7 @@
                 <a:solidFill>
                   <a:srgbClr val="7EA6BD"/>
                 </a:solidFill>
-                <a:latin typeface="Karla"/>
+                <a:latin typeface="Calibri"/>
               </a:rPr>
               <a:t>WHAT IT HAS TO COVER</a:t>
             </a:r>
@@ -13936,11 +13936,11 @@
               </a:spcAft>
             </a:pPr>
             <a:r>
-              <a:rPr sz="3200" b="1" i="0">
+              <a:rPr sz="3200" b="0" i="0">
                 <a:solidFill>
                   <a:srgbClr val="39424A"/>
                 </a:solidFill>
-                <a:latin typeface="Libre Caslon Display"/>
+                <a:latin typeface="Georgia"/>
               </a:rPr>
               <a:t>Six things, every month</a:t>
             </a:r>
@@ -14094,11 +14094,11 @@
               </a:spcAft>
             </a:pPr>
             <a:r>
-              <a:rPr sz="1400" b="1" i="0">
+              <a:rPr sz="1400" b="0" i="0">
                 <a:solidFill>
                   <a:srgbClr val="2F5470"/>
                 </a:solidFill>
-                <a:latin typeface="Libre Caslon Display"/>
+                <a:latin typeface="Georgia"/>
               </a:rPr>
               <a:t>Somewhere to live</a:t>
             </a:r>
@@ -14252,11 +14252,11 @@
               </a:spcAft>
             </a:pPr>
             <a:r>
-              <a:rPr sz="1400" b="1" i="0">
+              <a:rPr sz="1400" b="0" i="0">
                 <a:solidFill>
                   <a:srgbClr val="2F5470"/>
                 </a:solidFill>
-                <a:latin typeface="Libre Caslon Display"/>
+                <a:latin typeface="Georgia"/>
               </a:rPr>
               <a:t>Bills</a:t>
             </a:r>
@@ -14410,11 +14410,11 @@
               </a:spcAft>
             </a:pPr>
             <a:r>
-              <a:rPr sz="1400" b="1" i="0">
+              <a:rPr sz="1400" b="0" i="0">
                 <a:solidFill>
                   <a:srgbClr val="2F5470"/>
                 </a:solidFill>
-                <a:latin typeface="Libre Caslon Display"/>
+                <a:latin typeface="Georgia"/>
               </a:rPr>
               <a:t>Food</a:t>
             </a:r>
@@ -14568,11 +14568,11 @@
               </a:spcAft>
             </a:pPr>
             <a:r>
-              <a:rPr sz="1400" b="1" i="0">
+              <a:rPr sz="1400" b="0" i="0">
                 <a:solidFill>
                   <a:srgbClr val="2F5470"/>
                 </a:solidFill>
-                <a:latin typeface="Libre Caslon Display"/>
+                <a:latin typeface="Georgia"/>
               </a:rPr>
               <a:t>Getting around</a:t>
             </a:r>
@@ -14726,11 +14726,11 @@
               </a:spcAft>
             </a:pPr>
             <a:r>
-              <a:rPr sz="1400" b="1" i="0">
+              <a:rPr sz="1400" b="0" i="0">
                 <a:solidFill>
                   <a:srgbClr val="2F5470"/>
                 </a:solidFill>
-                <a:latin typeface="Libre Caslon Display"/>
+                <a:latin typeface="Georgia"/>
               </a:rPr>
               <a:t>Phone and data</a:t>
             </a:r>
@@ -14884,11 +14884,11 @@
               </a:spcAft>
             </a:pPr>
             <a:r>
-              <a:rPr sz="1400" b="1" i="0">
+              <a:rPr sz="1400" b="0" i="0">
                 <a:solidFill>
                   <a:srgbClr val="2F5470"/>
                 </a:solidFill>
-                <a:latin typeface="Libre Caslon Display"/>
+                <a:latin typeface="Georgia"/>
               </a:rPr>
               <a:t>Something saved</a:t>
             </a:r>
@@ -14930,7 +14930,7 @@
                 <a:solidFill>
                   <a:srgbClr val="6B7681"/>
                 </a:solidFill>
-                <a:latin typeface="Karla"/>
+                <a:latin typeface="Calibri"/>
               </a:rPr>
               <a:t>And one thing that is not a bill. Nobody sticks to a month with nothing good in it.</a:t>
             </a:r>
@@ -14996,7 +14996,7 @@
                 <a:solidFill>
                   <a:srgbClr val="A2ACB5"/>
                 </a:solidFill>
-                <a:latin typeface="Karla"/>
+                <a:latin typeface="Calibri"/>
               </a:rPr>
               <a:t>The Pastoral Guide</a:t>
             </a:r>
@@ -15038,7 +15038,7 @@
                 <a:solidFill>
                   <a:srgbClr val="A2ACB5"/>
                 </a:solidFill>
-                <a:latin typeface="Karla"/>
+                <a:latin typeface="Calibri"/>
               </a:rPr>
               <a:t>6 / 22</a:t>
             </a:r>
@@ -15142,97 +15142,9 @@
                 <a:solidFill>
                   <a:srgbClr val="C3D6E2"/>
                 </a:solidFill>
-                <a:latin typeface="Karla"/>
+                <a:latin typeface="Calibri"/>
               </a:rPr>
               <a:t>THE FIRST OF THE MONTH</a:t>
-            </a:r>
-          </a:p>
-        </p:txBody>
-      </p:sp>
-      <p:sp>
-        <p:nvSpPr>
-          <p:cNvPr id="4" name="Rounded Rectangle 3"/>
-          <p:cNvSpPr/>
-          <p:nvPr/>
-        </p:nvSpPr>
-        <p:spPr>
-          <a:xfrm>
-            <a:off x="6967728" y="530352"/>
-            <a:ext cx="1490472" cy="347472"/>
-          </a:xfrm>
-          <a:prstGeom prst="roundRect">
-            <a:avLst>
-              <a:gd name="adj" fmla="val 50000"/>
-            </a:avLst>
-          </a:prstGeom>
-          <a:solidFill>
-            <a:srgbClr val="FFFDF7"/>
-          </a:solidFill>
-          <a:ln>
-            <a:noFill/>
-          </a:ln>
-          <a:effectLst/>
-        </p:spPr>
-        <p:style>
-          <a:lnRef idx="1">
-            <a:schemeClr val="accent1"/>
-          </a:lnRef>
-          <a:fillRef idx="3">
-            <a:schemeClr val="accent1"/>
-          </a:fillRef>
-          <a:effectRef idx="2">
-            <a:schemeClr val="accent1"/>
-          </a:effectRef>
-          <a:fontRef idx="minor">
-            <a:schemeClr val="lt1"/>
-          </a:fontRef>
-        </p:style>
-        <p:txBody>
-          <a:bodyPr rtlCol="0" anchor="ctr"/>
-          <a:lstStyle/>
-          <a:p>
-            <a:pPr algn="ctr"/>
-          </a:p>
-        </p:txBody>
-      </p:sp>
-      <p:sp>
-        <p:nvSpPr>
-          <p:cNvPr id="5" name="TextBox 4"/>
-          <p:cNvSpPr txBox="1"/>
-          <p:nvPr/>
-        </p:nvSpPr>
-        <p:spPr>
-          <a:xfrm>
-            <a:off x="6967728" y="589788"/>
-            <a:ext cx="1490472" cy="237744"/>
-          </a:xfrm>
-          <a:prstGeom prst="rect">
-            <a:avLst/>
-          </a:prstGeom>
-          <a:noFill/>
-        </p:spPr>
-        <p:txBody>
-          <a:bodyPr wrap="square" lIns="0" rIns="0" tIns="0" bIns="0" anchor="t">
-            <a:spAutoFit/>
-          </a:bodyPr>
-          <a:lstStyle/>
-          <a:p>
-            <a:pPr algn="ctr">
-              <a:lnSpc>
-                <a:spcPct val="125000"/>
-              </a:lnSpc>
-              <a:spcAft>
-                <a:spcPts val="0"/>
-              </a:spcAft>
-            </a:pPr>
-            <a:r>
-              <a:rPr sz="1000" b="1" i="0" spc="100">
-                <a:solidFill>
-                  <a:srgbClr val="2F5470"/>
-                </a:solidFill>
-                <a:latin typeface="Karla"/>
-              </a:rPr>
-              <a:t>YOUR TURN</a:t>
             </a:r>
           </a:p>
         </p:txBody>
@@ -15268,11 +15180,11 @@
               </a:spcAft>
             </a:pPr>
             <a:r>
-              <a:rPr sz="4200" b="1" i="0">
+              <a:rPr sz="4200" b="0" i="0">
                 <a:solidFill>
                   <a:srgbClr val="FFFDF7"/>
                 </a:solidFill>
-                <a:latin typeface="Libre Caslon Display"/>
+                <a:latin typeface="Georgia"/>
               </a:rPr>
               <a:t>Spend it</a:t>
             </a:r>
@@ -15362,7 +15274,7 @@
                 <a:solidFill>
                   <a:srgbClr val="2F5470"/>
                 </a:solidFill>
-                <a:latin typeface="Karla"/>
+                <a:latin typeface="Calibri"/>
               </a:rPr>
               <a:t>Every category covered. Nothing left blank.</a:t>
             </a:r>
@@ -15452,7 +15364,7 @@
                 <a:solidFill>
                   <a:srgbClr val="2F5470"/>
                 </a:solidFill>
-                <a:latin typeface="Karla"/>
+                <a:latin typeface="Calibri"/>
               </a:rPr>
               <a:t>At least £50 put away, or an honest reason why not.</a:t>
             </a:r>
@@ -15542,7 +15454,7 @@
                 <a:solidFill>
                   <a:srgbClr val="2F5470"/>
                 </a:solidFill>
-                <a:latin typeface="Karla"/>
+                <a:latin typeface="Calibri"/>
               </a:rPr>
               <a:t>One thing in there that is not a bill.</a:t>
             </a:r>
@@ -15584,7 +15496,7 @@
                 <a:solidFill>
                   <a:srgbClr val="C3D6E2"/>
                 </a:solidFill>
-                <a:latin typeface="Karla"/>
+                <a:latin typeface="Calibri"/>
               </a:rPr>
               <a:t>Keep whatever is left. You are going to need it.</a:t>
             </a:r>
@@ -15650,7 +15562,7 @@
                 <a:solidFill>
                   <a:srgbClr val="C3D6E2"/>
                 </a:solidFill>
-                <a:latin typeface="Karla"/>
+                <a:latin typeface="Calibri"/>
               </a:rPr>
               <a:t>The Pastoral Guide</a:t>
             </a:r>
@@ -15692,7 +15604,7 @@
                 <a:solidFill>
                   <a:srgbClr val="C3D6E2"/>
                 </a:solidFill>
-                <a:latin typeface="Karla"/>
+                <a:latin typeface="Calibri"/>
               </a:rPr>
               <a:t>7 / 22</a:t>
             </a:r>
@@ -15842,7 +15754,7 @@
                 <a:solidFill>
                   <a:srgbClr val="2F5470"/>
                 </a:solidFill>
-                <a:latin typeface="Karla"/>
+                <a:latin typeface="Calibri"/>
               </a:rPr>
               <a:t>OPTIONAL</a:t>
             </a:r>
@@ -15884,7 +15796,7 @@
                 <a:solidFill>
                   <a:srgbClr val="7EA6BD"/>
                 </a:solidFill>
-                <a:latin typeface="Karla"/>
+                <a:latin typeface="Calibri"/>
               </a:rPr>
               <a:t>IF YOUR TEACHER HAS SET IT UP</a:t>
             </a:r>
@@ -15922,11 +15834,11 @@
               </a:spcAft>
             </a:pPr>
             <a:r>
-              <a:rPr sz="3200" b="1" i="0">
+              <a:rPr sz="3200" b="0" i="0">
                 <a:solidFill>
                   <a:srgbClr val="39424A"/>
                 </a:solidFill>
-                <a:latin typeface="Libre Caslon Display"/>
+                <a:latin typeface="Georgia"/>
               </a:rPr>
               <a:t>The shop is open</a:t>
             </a:r>
@@ -15968,7 +15880,7 @@
                 <a:solidFill>
                   <a:srgbClr val="6B7681"/>
                 </a:solidFill>
-                <a:latin typeface="Karla"/>
+                <a:latin typeface="Calibri"/>
               </a:rPr>
               <a:t>Twelve things you might want. Some are one payment, some every month.</a:t>
             </a:r>
@@ -16054,11 +15966,11 @@
               </a:spcAft>
             </a:pPr>
             <a:r>
-              <a:rPr sz="1250" b="1" i="0">
+              <a:rPr sz="1250" b="0" i="0">
                 <a:solidFill>
                   <a:srgbClr val="39424A"/>
                 </a:solidFill>
-                <a:latin typeface="Libre Caslon Display"/>
+                <a:latin typeface="Georgia"/>
               </a:rPr>
               <a:t>Trainers</a:t>
             </a:r>
@@ -16096,11 +16008,11 @@
               </a:spcAft>
             </a:pPr>
             <a:r>
-              <a:rPr sz="1500" b="1" i="0">
+              <a:rPr sz="1500" b="0" i="0">
                 <a:solidFill>
                   <a:srgbClr val="2F5470"/>
                 </a:solidFill>
-                <a:latin typeface="Libre Caslon Display"/>
+                <a:latin typeface="Georgia"/>
               </a:rPr>
               <a:t>£85</a:t>
             </a:r>
@@ -16186,11 +16098,11 @@
               </a:spcAft>
             </a:pPr>
             <a:r>
-              <a:rPr sz="1250" b="1" i="0">
+              <a:rPr sz="1250" b="0" i="0">
                 <a:solidFill>
                   <a:srgbClr val="39424A"/>
                 </a:solidFill>
-                <a:latin typeface="Libre Caslon Display"/>
+                <a:latin typeface="Georgia"/>
               </a:rPr>
               <a:t>Smart watch</a:t>
             </a:r>
@@ -16228,11 +16140,11 @@
               </a:spcAft>
             </a:pPr>
             <a:r>
-              <a:rPr sz="1500" b="1" i="0">
+              <a:rPr sz="1500" b="0" i="0">
                 <a:solidFill>
                   <a:srgbClr val="2F5470"/>
                 </a:solidFill>
-                <a:latin typeface="Libre Caslon Display"/>
+                <a:latin typeface="Georgia"/>
               </a:rPr>
               <a:t>£190</a:t>
             </a:r>
@@ -16318,11 +16230,11 @@
               </a:spcAft>
             </a:pPr>
             <a:r>
-              <a:rPr sz="1250" b="1" i="0">
+              <a:rPr sz="1250" b="0" i="0">
                 <a:solidFill>
                   <a:srgbClr val="39424A"/>
                 </a:solidFill>
-                <a:latin typeface="Libre Caslon Display"/>
+                <a:latin typeface="Georgia"/>
               </a:rPr>
               <a:t>Concert ticket</a:t>
             </a:r>
@@ -16360,11 +16272,11 @@
               </a:spcAft>
             </a:pPr>
             <a:r>
-              <a:rPr sz="1500" b="1" i="0">
+              <a:rPr sz="1500" b="0" i="0">
                 <a:solidFill>
                   <a:srgbClr val="2F5470"/>
                 </a:solidFill>
-                <a:latin typeface="Libre Caslon Display"/>
+                <a:latin typeface="Georgia"/>
               </a:rPr>
               <a:t>£65</a:t>
             </a:r>
@@ -16450,11 +16362,11 @@
               </a:spcAft>
             </a:pPr>
             <a:r>
-              <a:rPr sz="1250" b="1" i="0">
+              <a:rPr sz="1250" b="0" i="0">
                 <a:solidFill>
                   <a:srgbClr val="39424A"/>
                 </a:solidFill>
-                <a:latin typeface="Libre Caslon Display"/>
+                <a:latin typeface="Georgia"/>
               </a:rPr>
               <a:t>Gaming subscription</a:t>
             </a:r>
@@ -16492,11 +16404,11 @@
               </a:spcAft>
             </a:pPr>
             <a:r>
-              <a:rPr sz="1500" b="1" i="0">
+              <a:rPr sz="1500" b="0" i="0">
                 <a:solidFill>
                   <a:srgbClr val="2F5470"/>
                 </a:solidFill>
-                <a:latin typeface="Libre Caslon Display"/>
+                <a:latin typeface="Georgia"/>
               </a:rPr>
               <a:t>£11 a month</a:t>
             </a:r>
@@ -16582,11 +16494,11 @@
               </a:spcAft>
             </a:pPr>
             <a:r>
-              <a:rPr sz="1250" b="1" i="0">
+              <a:rPr sz="1250" b="0" i="0">
                 <a:solidFill>
                   <a:srgbClr val="39424A"/>
                 </a:solidFill>
-                <a:latin typeface="Libre Caslon Display"/>
+                <a:latin typeface="Georgia"/>
               </a:rPr>
               <a:t>Coffee before work</a:t>
             </a:r>
@@ -16624,11 +16536,11 @@
               </a:spcAft>
             </a:pPr>
             <a:r>
-              <a:rPr sz="1500" b="1" i="0">
+              <a:rPr sz="1500" b="0" i="0">
                 <a:solidFill>
                   <a:srgbClr val="2F5470"/>
                 </a:solidFill>
-                <a:latin typeface="Libre Caslon Display"/>
+                <a:latin typeface="Georgia"/>
               </a:rPr>
               <a:t>£48 a month</a:t>
             </a:r>
@@ -16714,11 +16626,11 @@
               </a:spcAft>
             </a:pPr>
             <a:r>
-              <a:rPr sz="1250" b="1" i="0">
+              <a:rPr sz="1250" b="0" i="0">
                 <a:solidFill>
                   <a:srgbClr val="39424A"/>
                 </a:solidFill>
-                <a:latin typeface="Libre Caslon Display"/>
+                <a:latin typeface="Georgia"/>
               </a:rPr>
               <a:t>Weekend away</a:t>
             </a:r>
@@ -16756,11 +16668,11 @@
               </a:spcAft>
             </a:pPr>
             <a:r>
-              <a:rPr sz="1500" b="1" i="0">
+              <a:rPr sz="1500" b="0" i="0">
                 <a:solidFill>
                   <a:srgbClr val="2F5470"/>
                 </a:solidFill>
-                <a:latin typeface="Libre Caslon Display"/>
+                <a:latin typeface="Georgia"/>
               </a:rPr>
               <a:t>£160</a:t>
             </a:r>
@@ -16802,7 +16714,7 @@
                 <a:solidFill>
                   <a:srgbClr val="2F5470"/>
                 </a:solidFill>
-                <a:latin typeface="Karla"/>
+                <a:latin typeface="Calibri"/>
               </a:rPr>
               <a:t>Six more on the cards. Everything you buy now is money you will not have later.</a:t>
             </a:r>
@@ -16868,7 +16780,7 @@
                 <a:solidFill>
                   <a:srgbClr val="A2ACB5"/>
                 </a:solidFill>
-                <a:latin typeface="Karla"/>
+                <a:latin typeface="Calibri"/>
               </a:rPr>
               <a:t>The Pastoral Guide</a:t>
             </a:r>
@@ -16910,7 +16822,7 @@
                 <a:solidFill>
                   <a:srgbClr val="A2ACB5"/>
                 </a:solidFill>
-                <a:latin typeface="Karla"/>
+                <a:latin typeface="Calibri"/>
               </a:rPr>
               <a:t>8 / 22</a:t>
             </a:r>
@@ -17014,7 +16926,7 @@
                 <a:solidFill>
                   <a:srgbClr val="C3D6E2"/>
                 </a:solidFill>
-                <a:latin typeface="Karla"/>
+                <a:latin typeface="Calibri"/>
               </a:rPr>
               <a:t>THE SECOND</a:t>
             </a:r>
@@ -17102,7 +17014,7 @@
                 <a:solidFill>
                   <a:srgbClr val="2F5470"/>
                 </a:solidFill>
-                <a:latin typeface="Karla"/>
+                <a:latin typeface="Calibri"/>
               </a:rPr>
               <a:t>EVENT 1 OF 10</a:t>
             </a:r>
@@ -17140,21 +17052,21 @@
               </a:spcAft>
             </a:pPr>
             <a:r>
-              <a:rPr sz="2500" b="1" i="0">
+              <a:rPr sz="2500" b="0" i="0">
                 <a:solidFill>
                   <a:srgbClr val="FFFDF7"/>
                 </a:solidFill>
-                <a:latin typeface="Libre Caslon Display"/>
+                <a:latin typeface="Georgia"/>
               </a:rPr>
               <a:t>Your landlord renews the contract.</a:t>
             </a:r>
             <a:br/>
             <a:r>
-              <a:rPr sz="2500" b="1" i="0">
+              <a:rPr sz="2500" b="0" i="0">
                 <a:solidFill>
                   <a:srgbClr val="FFFDF7"/>
                 </a:solidFill>
-                <a:latin typeface="Libre Caslon Display"/>
+                <a:latin typeface="Georgia"/>
               </a:rPr>
               <a:t>The rent is going up.</a:t>
             </a:r>
@@ -17196,7 +17108,7 @@
                 <a:solidFill>
                   <a:srgbClr val="C3D6E2"/>
                 </a:solidFill>
-                <a:latin typeface="Karla"/>
+                <a:latin typeface="Calibri"/>
               </a:rPr>
               <a:t>Not by much, they say. Sixty pounds. From this month, and every month after it.</a:t>
             </a:r>
@@ -17350,11 +17262,11 @@
               </a:spcAft>
             </a:pPr>
             <a:r>
-              <a:rPr sz="1450" b="1" i="0">
+              <a:rPr sz="1450" b="0" i="0">
                 <a:solidFill>
                   <a:srgbClr val="2F5470"/>
                 </a:solidFill>
-                <a:latin typeface="Libre Caslon Display"/>
+                <a:latin typeface="Georgia"/>
               </a:rPr>
               <a:t>Rent up £60, from now on</a:t>
             </a:r>
@@ -17420,7 +17332,7 @@
                 <a:solidFill>
                   <a:srgbClr val="C3D6E2"/>
                 </a:solidFill>
-                <a:latin typeface="Karla"/>
+                <a:latin typeface="Calibri"/>
               </a:rPr>
               <a:t>The Pastoral Guide</a:t>
             </a:r>
@@ -17462,7 +17374,7 @@
                 <a:solidFill>
                   <a:srgbClr val="C3D6E2"/>
                 </a:solidFill>
-                <a:latin typeface="Karla"/>
+                <a:latin typeface="Calibri"/>
               </a:rPr>
               <a:t>9 / 22</a:t>
             </a:r>

--- a/tutor-time/payday-budgeting-lesson/downloads/Payday.pptx
+++ b/tutor-time/payday-budgeting-lesson/downloads/Payday.pptx
@@ -3300,7 +3300,7 @@
                 </a:solidFill>
                 <a:latin typeface="Calibri"/>
               </a:rPr>
-              <a:t>One month. One wage. Everything it has to cover.</a:t>
+              <a:t>Plan a month on one wage.</a:t>
             </a:r>
           </a:p>
         </p:txBody>
